--- a/session4/exam-strategy/q5/q5_exam_strategy.pptx
+++ b/session4/exam-strategy/q5/q5_exam_strategy.pptx
@@ -3188,8 +3188,8 @@
         </p:nvSpPr>
         <p:spPr>
           <a:xfrm>
-            <a:off x="274320" y="685800"/>
-            <a:ext cx="6400800" cy="1645920"/>
+            <a:off x="274320" y="640080"/>
+            <a:ext cx="6583680" cy="1280160"/>
           </a:xfrm>
           <a:prstGeom prst="rect">
             <a:avLst/>
@@ -3197,13 +3197,13 @@
           <a:noFill/>
         </p:spPr>
         <p:txBody>
-          <a:bodyPr wrap="square">
+          <a:bodyPr wrap="square" tIns="0" bIns="0">
             <a:spAutoFit/>
           </a:bodyPr>
           <a:lstStyle/>
           <a:p>
             <a:pPr>
-              <a:defRPr sz="1100">
+              <a:defRPr sz="900">
                 <a:solidFill>
                   <a:srgbClr val="FFFFFF"/>
                 </a:solidFill>
@@ -3211,7 +3211,7 @@
               </a:defRPr>
             </a:pPr>
             <a:r>
-              <a:t>Each time a developer publishes a new version of an AWS Lambda function, all the dependent event source mappings need to be updated with the reference to the new version’s Amazon Resource Name (ARN). These updates are time consuming and error-prone. Which combination of actions should the developer take to avoid performing these updates when publishing a new Lambda version? (Select TWO.)</a:t>
+              <a:t>Each time a developer publishes a new version of an AWS Lambda function, all the dependent event source mappings need to be updated with the reference to the new version’s Amazon Resource Name (ARN). These updates are time consuming and error-prone. Which combination of actions should the developer take to avoid performing these updates when pub...</a:t>
             </a:r>
           </a:p>
         </p:txBody>
@@ -3224,8 +3224,8 @@
         </p:nvSpPr>
         <p:spPr>
           <a:xfrm>
-            <a:off x="365760" y="2377440"/>
-            <a:ext cx="274320" cy="274320"/>
+            <a:off x="274320" y="2057400"/>
+            <a:ext cx="201168" cy="201168"/>
           </a:xfrm>
           <a:prstGeom prst="ellipse">
             <a:avLst/>
@@ -3256,7 +3256,7 @@
           <a:lstStyle/>
           <a:p>
             <a:pPr algn="ctr">
-              <a:defRPr sz="900" b="1">
+              <a:defRPr sz="700" b="1">
                 <a:solidFill>
                   <a:srgbClr val="FFFFFF"/>
                 </a:solidFill>
@@ -3276,8 +3276,8 @@
         </p:nvSpPr>
         <p:spPr>
           <a:xfrm>
-            <a:off x="777240" y="2377440"/>
-            <a:ext cx="5943600" cy="411480"/>
+            <a:off x="548640" y="2011680"/>
+            <a:ext cx="6400800" cy="585215"/>
           </a:xfrm>
           <a:prstGeom prst="rect">
             <a:avLst/>
@@ -3285,13 +3285,13 @@
           <a:noFill/>
         </p:spPr>
         <p:txBody>
-          <a:bodyPr wrap="square">
+          <a:bodyPr wrap="square" tIns="25400" bIns="0" lIns="0">
             <a:spAutoFit/>
           </a:bodyPr>
           <a:lstStyle/>
           <a:p>
             <a:pPr>
-              <a:defRPr sz="1000">
+              <a:defRPr sz="800">
                 <a:solidFill>
                   <a:srgbClr val="CCCCCC"/>
                 </a:solidFill>
@@ -3299,7 +3299,7 @@
               </a:defRPr>
             </a:pPr>
             <a:r>
-              <a:t>A Lambda event source mapping can either point to the version ARN, or an alias ARN, but not to the layer ARN.</a:t>
+              <a:t>A Lambda event source mapping can either point to the version ARN, or an alias ARN, but not to the l</a:t>
             </a:r>
           </a:p>
         </p:txBody>
@@ -3312,8 +3312,8 @@
         </p:nvSpPr>
         <p:spPr>
           <a:xfrm>
-            <a:off x="365760" y="2834640"/>
-            <a:ext cx="274320" cy="274320"/>
+            <a:off x="274320" y="2660904"/>
+            <a:ext cx="201168" cy="201168"/>
           </a:xfrm>
           <a:prstGeom prst="ellipse">
             <a:avLst/>
@@ -3344,7 +3344,7 @@
           <a:lstStyle/>
           <a:p>
             <a:pPr algn="ctr">
-              <a:defRPr sz="900" b="1">
+              <a:defRPr sz="700" b="1">
                 <a:solidFill>
                   <a:srgbClr val="FFFFFF"/>
                 </a:solidFill>
@@ -3364,8 +3364,8 @@
         </p:nvSpPr>
         <p:spPr>
           <a:xfrm>
-            <a:off x="777240" y="2834640"/>
-            <a:ext cx="5943600" cy="411480"/>
+            <a:off x="548640" y="2615184"/>
+            <a:ext cx="6400800" cy="585215"/>
           </a:xfrm>
           <a:prstGeom prst="rect">
             <a:avLst/>
@@ -3373,13 +3373,13 @@
           <a:noFill/>
         </p:spPr>
         <p:txBody>
-          <a:bodyPr wrap="square">
+          <a:bodyPr wrap="square" tIns="25400" bIns="0" lIns="0">
             <a:spAutoFit/>
           </a:bodyPr>
           <a:lstStyle/>
           <a:p>
             <a:pPr>
-              <a:defRPr sz="1000">
+              <a:defRPr sz="800">
                 <a:solidFill>
                   <a:srgbClr val="CCCCCC"/>
                 </a:solidFill>
@@ -3400,8 +3400,8 @@
         </p:nvSpPr>
         <p:spPr>
           <a:xfrm>
-            <a:off x="365760" y="3291840"/>
-            <a:ext cx="274320" cy="274320"/>
+            <a:off x="274320" y="3264408"/>
+            <a:ext cx="201168" cy="201168"/>
           </a:xfrm>
           <a:prstGeom prst="ellipse">
             <a:avLst/>
@@ -3432,7 +3432,7 @@
           <a:lstStyle/>
           <a:p>
             <a:pPr algn="ctr">
-              <a:defRPr sz="900" b="1">
+              <a:defRPr sz="700" b="1">
                 <a:solidFill>
                   <a:srgbClr val="FFFFFF"/>
                 </a:solidFill>
@@ -3452,8 +3452,8 @@
         </p:nvSpPr>
         <p:spPr>
           <a:xfrm>
-            <a:off x="777240" y="3291840"/>
-            <a:ext cx="5943600" cy="411480"/>
+            <a:off x="548640" y="3218688"/>
+            <a:ext cx="6400800" cy="585215"/>
           </a:xfrm>
           <a:prstGeom prst="rect">
             <a:avLst/>
@@ -3461,13 +3461,13 @@
           <a:noFill/>
         </p:spPr>
         <p:txBody>
-          <a:bodyPr wrap="square">
+          <a:bodyPr wrap="square" tIns="25400" bIns="0" lIns="0">
             <a:spAutoFit/>
           </a:bodyPr>
           <a:lstStyle/>
           <a:p>
             <a:pPr>
-              <a:defRPr sz="1000">
+              <a:defRPr sz="800">
                 <a:solidFill>
                   <a:srgbClr val="CCCCCC"/>
                 </a:solidFill>
@@ -3475,7 +3475,7 @@
               </a:defRPr>
             </a:pPr>
             <a:r>
-              <a:t>This solution does not address your problem. Every alias has its own unique ARN. Therefore, you would still need to upda</a:t>
+              <a:t>This solution does not address your problem. Every alias has its own unique ARN. Therefore, you woul</a:t>
             </a:r>
           </a:p>
         </p:txBody>
@@ -3488,8 +3488,8 @@
         </p:nvSpPr>
         <p:spPr>
           <a:xfrm>
-            <a:off x="365760" y="3749039"/>
-            <a:ext cx="274320" cy="274320"/>
+            <a:off x="274320" y="3867911"/>
+            <a:ext cx="201168" cy="201168"/>
           </a:xfrm>
           <a:prstGeom prst="ellipse">
             <a:avLst/>
@@ -3520,7 +3520,7 @@
           <a:lstStyle/>
           <a:p>
             <a:pPr algn="ctr">
-              <a:defRPr sz="900" b="1">
+              <a:defRPr sz="700" b="1">
                 <a:solidFill>
                   <a:srgbClr val="FFFFFF"/>
                 </a:solidFill>
@@ -3540,8 +3540,8 @@
         </p:nvSpPr>
         <p:spPr>
           <a:xfrm>
-            <a:off x="777240" y="3749039"/>
-            <a:ext cx="5943600" cy="411480"/>
+            <a:off x="548640" y="3822191"/>
+            <a:ext cx="6400800" cy="585215"/>
           </a:xfrm>
           <a:prstGeom prst="rect">
             <a:avLst/>
@@ -3549,13 +3549,13 @@
           <a:noFill/>
         </p:spPr>
         <p:txBody>
-          <a:bodyPr wrap="square">
+          <a:bodyPr wrap="square" tIns="25400" bIns="0" lIns="0">
             <a:spAutoFit/>
           </a:bodyPr>
           <a:lstStyle/>
           <a:p>
             <a:pPr>
-              <a:defRPr sz="1000">
+              <a:defRPr sz="800">
                 <a:solidFill>
                   <a:srgbClr val="CCCCCC"/>
                 </a:solidFill>
@@ -3576,8 +3576,8 @@
         </p:nvSpPr>
         <p:spPr>
           <a:xfrm>
-            <a:off x="365760" y="4206240"/>
-            <a:ext cx="274320" cy="274320"/>
+            <a:off x="274320" y="4471416"/>
+            <a:ext cx="201168" cy="201168"/>
           </a:xfrm>
           <a:prstGeom prst="ellipse">
             <a:avLst/>
@@ -3608,7 +3608,7 @@
           <a:lstStyle/>
           <a:p>
             <a:pPr algn="ctr">
-              <a:defRPr sz="900" b="1">
+              <a:defRPr sz="700" b="1">
                 <a:solidFill>
                   <a:srgbClr val="FFFFFF"/>
                 </a:solidFill>
@@ -3628,8 +3628,8 @@
         </p:nvSpPr>
         <p:spPr>
           <a:xfrm>
-            <a:off x="777240" y="4206240"/>
-            <a:ext cx="5943600" cy="411480"/>
+            <a:off x="548640" y="4425696"/>
+            <a:ext cx="6400800" cy="585215"/>
           </a:xfrm>
           <a:prstGeom prst="rect">
             <a:avLst/>
@@ -3637,13 +3637,13 @@
           <a:noFill/>
         </p:spPr>
         <p:txBody>
-          <a:bodyPr wrap="square">
+          <a:bodyPr wrap="square" tIns="25400" bIns="0" lIns="0">
             <a:spAutoFit/>
           </a:bodyPr>
           <a:lstStyle/>
           <a:p>
             <a:pPr>
-              <a:defRPr sz="1000">
+              <a:defRPr sz="800">
                 <a:solidFill>
                   <a:srgbClr val="CCCCCC"/>
                 </a:solidFill>
@@ -3651,7 +3651,7 @@
               </a:defRPr>
             </a:pPr>
             <a:r>
-              <a:t>Instead of using ARNs for the Lambda function in event source mappings, you can use an alias ARN. You do not need to upd</a:t>
+              <a:t>Instead of using ARNs for the Lambda function in event source mappings, you can use an alias ARN. Yo</a:t>
             </a:r>
           </a:p>
         </p:txBody>
@@ -3933,8 +3933,8 @@
         </p:blipFill>
         <p:spPr>
           <a:xfrm>
-            <a:off x="182880" y="914400"/>
-            <a:ext cx="3228638" cy="3840480"/>
+            <a:off x="182880" y="1222454"/>
+            <a:ext cx="5303520" cy="3224371"/>
           </a:xfrm>
           <a:prstGeom prst="rect">
             <a:avLst/>
@@ -4069,9 +4069,9 @@
           <a:p>
             <a:pPr>
               <a:spcAft>
-                <a:spcPts val="600"/>
+                <a:spcPts val="400"/>
               </a:spcAft>
-              <a:defRPr sz="900">
+              <a:defRPr sz="800">
                 <a:solidFill>
                   <a:srgbClr val="212121"/>
                 </a:solidFill>
@@ -4079,7 +4079,7 @@
               </a:defRPr>
             </a:pPr>
             <a:r>
-              <a:t>• A Lambda event source mapping can either point to the version ARN, or an alias ARN, but not to the layer ARN.</a:t>
+              <a:t>• A Lambda event source mapping can either point to the version ARN, or an alias ARN, but not to the layer ARN</a:t>
             </a:r>
           </a:p>
         </p:txBody>
@@ -4259,7 +4259,7 @@
         <p:spPr>
           <a:xfrm>
             <a:off x="182880" y="914400"/>
-            <a:ext cx="3115683" cy="3840480"/>
+            <a:ext cx="3995417" cy="3840480"/>
           </a:xfrm>
           <a:prstGeom prst="rect">
             <a:avLst/>
@@ -4394,9 +4394,9 @@
           <a:p>
             <a:pPr>
               <a:spcAft>
-                <a:spcPts val="600"/>
+                <a:spcPts val="400"/>
               </a:spcAft>
-              <a:defRPr sz="900">
+              <a:defRPr sz="800">
                 <a:solidFill>
                   <a:srgbClr val="212121"/>
                 </a:solidFill>
@@ -4404,7 +4404,7 @@
               </a:defRPr>
             </a:pPr>
             <a:r>
-              <a:t>• A Lambda alias is a pointer to a specific Lambda function version.</a:t>
+              <a:t>• A Lambda alias is a pointer to a specific Lambda function version</a:t>
             </a:r>
           </a:p>
         </p:txBody>
@@ -4584,7 +4584,7 @@
         <p:spPr>
           <a:xfrm>
             <a:off x="182880" y="914400"/>
-            <a:ext cx="3228638" cy="3840480"/>
+            <a:ext cx="3942497" cy="3840480"/>
           </a:xfrm>
           <a:prstGeom prst="rect">
             <a:avLst/>
@@ -4719,9 +4719,9 @@
           <a:p>
             <a:pPr>
               <a:spcAft>
-                <a:spcPts val="600"/>
+                <a:spcPts val="400"/>
               </a:spcAft>
-              <a:defRPr sz="900">
+              <a:defRPr sz="800">
                 <a:solidFill>
                   <a:srgbClr val="212121"/>
                 </a:solidFill>
@@ -4729,15 +4729,15 @@
               </a:defRPr>
             </a:pPr>
             <a:r>
-              <a:t>• This solution does not address your problem.</a:t>
+              <a:t>• This solution does not address your problem</a:t>
             </a:r>
           </a:p>
           <a:p>
             <a:pPr>
               <a:spcAft>
-                <a:spcPts val="600"/>
+                <a:spcPts val="400"/>
               </a:spcAft>
-              <a:defRPr sz="900">
+              <a:defRPr sz="800">
                 <a:solidFill>
                   <a:srgbClr val="212121"/>
                 </a:solidFill>
@@ -4745,15 +4745,15 @@
               </a:defRPr>
             </a:pPr>
             <a:r>
-              <a:t>• Every alias has its own unique ARN.</a:t>
+              <a:t>• Every alias has its own unique ARN</a:t>
             </a:r>
           </a:p>
           <a:p>
             <a:pPr>
               <a:spcAft>
-                <a:spcPts val="600"/>
+                <a:spcPts val="400"/>
               </a:spcAft>
-              <a:defRPr sz="900">
+              <a:defRPr sz="800">
                 <a:solidFill>
                   <a:srgbClr val="212121"/>
                 </a:solidFill>
@@ -4761,7 +4761,7 @@
               </a:defRPr>
             </a:pPr>
             <a:r>
-              <a:t>• Therefore, you would still need to update the event source mapping with the new ARN when a new version is published.</a:t>
+              <a:t>• Therefore, you would still need to update the event source mapping with the new ARN when a new version is published</a:t>
             </a:r>
           </a:p>
         </p:txBody>
@@ -4940,8 +4940,8 @@
         </p:blipFill>
         <p:spPr>
           <a:xfrm>
-            <a:off x="182880" y="914400"/>
-            <a:ext cx="3238051" cy="3840480"/>
+            <a:off x="182880" y="1307539"/>
+            <a:ext cx="5303520" cy="3054201"/>
           </a:xfrm>
           <a:prstGeom prst="rect">
             <a:avLst/>
@@ -5076,9 +5076,9 @@
           <a:p>
             <a:pPr>
               <a:spcAft>
-                <a:spcPts val="600"/>
+                <a:spcPts val="400"/>
               </a:spcAft>
-              <a:defRPr sz="900">
+              <a:defRPr sz="800">
                 <a:solidFill>
                   <a:srgbClr val="212121"/>
                 </a:solidFill>
@@ -5086,7 +5086,7 @@
               </a:defRPr>
             </a:pPr>
             <a:r>
-              <a:t>• A Lambda alias cannot point to another Lambda alias, only to a Lambda function version.</a:t>
+              <a:t>• A Lambda alias cannot point to another Lambda alias, only to a Lambda function version</a:t>
             </a:r>
           </a:p>
         </p:txBody>
@@ -5265,8 +5265,8 @@
         </p:blipFill>
         <p:spPr>
           <a:xfrm>
-            <a:off x="182880" y="914400"/>
-            <a:ext cx="3115683" cy="3840480"/>
+            <a:off x="182880" y="1236099"/>
+            <a:ext cx="5303520" cy="3197081"/>
           </a:xfrm>
           <a:prstGeom prst="rect">
             <a:avLst/>
@@ -5401,9 +5401,9 @@
           <a:p>
             <a:pPr>
               <a:spcAft>
-                <a:spcPts val="600"/>
+                <a:spcPts val="400"/>
               </a:spcAft>
-              <a:defRPr sz="900">
+              <a:defRPr sz="800">
                 <a:solidFill>
                   <a:srgbClr val="212121"/>
                 </a:solidFill>
@@ -5411,15 +5411,15 @@
               </a:defRPr>
             </a:pPr>
             <a:r>
-              <a:t>• Instead of using ARNs for the Lambda function in event source mappings, you can use an alias ARN.</a:t>
+              <a:t>• Instead of using ARNs for the Lambda function in event source mappings</a:t>
             </a:r>
           </a:p>
           <a:p>
             <a:pPr>
               <a:spcAft>
-                <a:spcPts val="600"/>
+                <a:spcPts val="400"/>
               </a:spcAft>
-              <a:defRPr sz="900">
+              <a:defRPr sz="800">
                 <a:solidFill>
                   <a:srgbClr val="212121"/>
                 </a:solidFill>
@@ -5427,7 +5427,23 @@
               </a:defRPr>
             </a:pPr>
             <a:r>
-              <a:t>• You do not need to update your event source mappings when you promote a new version or roll back to a previous version.</a:t>
+              <a:t>• You can use an alias ARN</a:t>
+            </a:r>
+          </a:p>
+          <a:p>
+            <a:pPr>
+              <a:spcAft>
+                <a:spcPts val="400"/>
+              </a:spcAft>
+              <a:defRPr sz="800">
+                <a:solidFill>
+                  <a:srgbClr val="212121"/>
+                </a:solidFill>
+                <a:latin typeface="Segoe UI"/>
+              </a:defRPr>
+            </a:pPr>
+            <a:r>
+              <a:t>• You do not need to update your event source mappings when you promote a new version or roll back to a previous version</a:t>
             </a:r>
           </a:p>
         </p:txBody>

--- a/session4/exam-strategy/q5/q5_exam_strategy.pptx
+++ b/session4/exam-strategy/q5/q5_exam_strategy.pptx
@@ -3188,8 +3188,8 @@
         </p:nvSpPr>
         <p:spPr>
           <a:xfrm>
-            <a:off x="274320" y="640080"/>
-            <a:ext cx="6583680" cy="1280160"/>
+            <a:off x="274320" y="685800"/>
+            <a:ext cx="6400800" cy="1645920"/>
           </a:xfrm>
           <a:prstGeom prst="rect">
             <a:avLst/>
@@ -3197,13 +3197,13 @@
           <a:noFill/>
         </p:spPr>
         <p:txBody>
-          <a:bodyPr wrap="square" tIns="0" bIns="0">
+          <a:bodyPr wrap="square">
             <a:spAutoFit/>
           </a:bodyPr>
           <a:lstStyle/>
           <a:p>
             <a:pPr>
-              <a:defRPr sz="900">
+              <a:defRPr sz="1100">
                 <a:solidFill>
                   <a:srgbClr val="FFFFFF"/>
                 </a:solidFill>
@@ -3211,7 +3211,7 @@
               </a:defRPr>
             </a:pPr>
             <a:r>
-              <a:t>Each time a developer publishes a new version of an AWS Lambda function, all the dependent event source mappings need to be updated with the reference to the new version’s Amazon Resource Name (ARN). These updates are time consuming and error-prone. Which combination of actions should the developer take to avoid performing these updates when pub...</a:t>
+              <a:t>Each time a developer publishes a new version of an AWS Lambda function, all the dependent event source mappings need to be updated with the reference to the new version’s Amazon Resource Name (ARN). These updates are time consuming and error-prone. Which combination of actions should the developer take to avoid performing these updates when publishing a new Lambda version? (Select TWO.)</a:t>
             </a:r>
           </a:p>
         </p:txBody>
@@ -3224,8 +3224,8 @@
         </p:nvSpPr>
         <p:spPr>
           <a:xfrm>
-            <a:off x="274320" y="2057400"/>
-            <a:ext cx="201168" cy="201168"/>
+            <a:off x="365760" y="2377440"/>
+            <a:ext cx="274320" cy="274320"/>
           </a:xfrm>
           <a:prstGeom prst="ellipse">
             <a:avLst/>
@@ -3256,7 +3256,7 @@
           <a:lstStyle/>
           <a:p>
             <a:pPr algn="ctr">
-              <a:defRPr sz="700" b="1">
+              <a:defRPr sz="900" b="1">
                 <a:solidFill>
                   <a:srgbClr val="FFFFFF"/>
                 </a:solidFill>
@@ -3276,8 +3276,8 @@
         </p:nvSpPr>
         <p:spPr>
           <a:xfrm>
-            <a:off x="548640" y="2011680"/>
-            <a:ext cx="6400800" cy="585215"/>
+            <a:off x="777240" y="2377440"/>
+            <a:ext cx="5943600" cy="411480"/>
           </a:xfrm>
           <a:prstGeom prst="rect">
             <a:avLst/>
@@ -3285,13 +3285,13 @@
           <a:noFill/>
         </p:spPr>
         <p:txBody>
-          <a:bodyPr wrap="square" tIns="25400" bIns="0" lIns="0">
+          <a:bodyPr wrap="square">
             <a:spAutoFit/>
           </a:bodyPr>
           <a:lstStyle/>
           <a:p>
             <a:pPr>
-              <a:defRPr sz="800">
+              <a:defRPr sz="1000">
                 <a:solidFill>
                   <a:srgbClr val="CCCCCC"/>
                 </a:solidFill>
@@ -3299,7 +3299,7 @@
               </a:defRPr>
             </a:pPr>
             <a:r>
-              <a:t>A Lambda event source mapping can either point to the version ARN, or an alias ARN, but not to the l</a:t>
+              <a:t>A Lambda event source mapping can either point to the version ARN, or an alias ARN, but not to the layer ARN.</a:t>
             </a:r>
           </a:p>
         </p:txBody>
@@ -3312,8 +3312,8 @@
         </p:nvSpPr>
         <p:spPr>
           <a:xfrm>
-            <a:off x="274320" y="2660904"/>
-            <a:ext cx="201168" cy="201168"/>
+            <a:off x="365760" y="2834640"/>
+            <a:ext cx="274320" cy="274320"/>
           </a:xfrm>
           <a:prstGeom prst="ellipse">
             <a:avLst/>
@@ -3344,7 +3344,7 @@
           <a:lstStyle/>
           <a:p>
             <a:pPr algn="ctr">
-              <a:defRPr sz="700" b="1">
+              <a:defRPr sz="900" b="1">
                 <a:solidFill>
                   <a:srgbClr val="FFFFFF"/>
                 </a:solidFill>
@@ -3364,8 +3364,8 @@
         </p:nvSpPr>
         <p:spPr>
           <a:xfrm>
-            <a:off x="548640" y="2615184"/>
-            <a:ext cx="6400800" cy="585215"/>
+            <a:off x="777240" y="2834640"/>
+            <a:ext cx="5943600" cy="411480"/>
           </a:xfrm>
           <a:prstGeom prst="rect">
             <a:avLst/>
@@ -3373,13 +3373,13 @@
           <a:noFill/>
         </p:spPr>
         <p:txBody>
-          <a:bodyPr wrap="square" tIns="25400" bIns="0" lIns="0">
+          <a:bodyPr wrap="square">
             <a:spAutoFit/>
           </a:bodyPr>
           <a:lstStyle/>
           <a:p>
             <a:pPr>
-              <a:defRPr sz="800">
+              <a:defRPr sz="1000">
                 <a:solidFill>
                   <a:srgbClr val="CCCCCC"/>
                 </a:solidFill>
@@ -3400,8 +3400,8 @@
         </p:nvSpPr>
         <p:spPr>
           <a:xfrm>
-            <a:off x="274320" y="3264408"/>
-            <a:ext cx="201168" cy="201168"/>
+            <a:off x="365760" y="3291840"/>
+            <a:ext cx="274320" cy="274320"/>
           </a:xfrm>
           <a:prstGeom prst="ellipse">
             <a:avLst/>
@@ -3432,7 +3432,7 @@
           <a:lstStyle/>
           <a:p>
             <a:pPr algn="ctr">
-              <a:defRPr sz="700" b="1">
+              <a:defRPr sz="900" b="1">
                 <a:solidFill>
                   <a:srgbClr val="FFFFFF"/>
                 </a:solidFill>
@@ -3452,8 +3452,8 @@
         </p:nvSpPr>
         <p:spPr>
           <a:xfrm>
-            <a:off x="548640" y="3218688"/>
-            <a:ext cx="6400800" cy="585215"/>
+            <a:off x="777240" y="3291840"/>
+            <a:ext cx="5943600" cy="411480"/>
           </a:xfrm>
           <a:prstGeom prst="rect">
             <a:avLst/>
@@ -3461,13 +3461,13 @@
           <a:noFill/>
         </p:spPr>
         <p:txBody>
-          <a:bodyPr wrap="square" tIns="25400" bIns="0" lIns="0">
+          <a:bodyPr wrap="square">
             <a:spAutoFit/>
           </a:bodyPr>
           <a:lstStyle/>
           <a:p>
             <a:pPr>
-              <a:defRPr sz="800">
+              <a:defRPr sz="1000">
                 <a:solidFill>
                   <a:srgbClr val="CCCCCC"/>
                 </a:solidFill>
@@ -3475,7 +3475,7 @@
               </a:defRPr>
             </a:pPr>
             <a:r>
-              <a:t>This solution does not address your problem. Every alias has its own unique ARN. Therefore, you woul</a:t>
+              <a:t>This solution does not address your problem. Every alias has its own unique ARN. Therefore, you would still need to upda</a:t>
             </a:r>
           </a:p>
         </p:txBody>
@@ -3488,8 +3488,8 @@
         </p:nvSpPr>
         <p:spPr>
           <a:xfrm>
-            <a:off x="274320" y="3867911"/>
-            <a:ext cx="201168" cy="201168"/>
+            <a:off x="365760" y="3749039"/>
+            <a:ext cx="274320" cy="274320"/>
           </a:xfrm>
           <a:prstGeom prst="ellipse">
             <a:avLst/>
@@ -3520,7 +3520,7 @@
           <a:lstStyle/>
           <a:p>
             <a:pPr algn="ctr">
-              <a:defRPr sz="700" b="1">
+              <a:defRPr sz="900" b="1">
                 <a:solidFill>
                   <a:srgbClr val="FFFFFF"/>
                 </a:solidFill>
@@ -3540,8 +3540,8 @@
         </p:nvSpPr>
         <p:spPr>
           <a:xfrm>
-            <a:off x="548640" y="3822191"/>
-            <a:ext cx="6400800" cy="585215"/>
+            <a:off x="777240" y="3749039"/>
+            <a:ext cx="5943600" cy="411480"/>
           </a:xfrm>
           <a:prstGeom prst="rect">
             <a:avLst/>
@@ -3549,13 +3549,13 @@
           <a:noFill/>
         </p:spPr>
         <p:txBody>
-          <a:bodyPr wrap="square" tIns="25400" bIns="0" lIns="0">
+          <a:bodyPr wrap="square">
             <a:spAutoFit/>
           </a:bodyPr>
           <a:lstStyle/>
           <a:p>
             <a:pPr>
-              <a:defRPr sz="800">
+              <a:defRPr sz="1000">
                 <a:solidFill>
                   <a:srgbClr val="CCCCCC"/>
                 </a:solidFill>
@@ -3576,8 +3576,8 @@
         </p:nvSpPr>
         <p:spPr>
           <a:xfrm>
-            <a:off x="274320" y="4471416"/>
-            <a:ext cx="201168" cy="201168"/>
+            <a:off x="365760" y="4206240"/>
+            <a:ext cx="274320" cy="274320"/>
           </a:xfrm>
           <a:prstGeom prst="ellipse">
             <a:avLst/>
@@ -3608,7 +3608,7 @@
           <a:lstStyle/>
           <a:p>
             <a:pPr algn="ctr">
-              <a:defRPr sz="700" b="1">
+              <a:defRPr sz="900" b="1">
                 <a:solidFill>
                   <a:srgbClr val="FFFFFF"/>
                 </a:solidFill>
@@ -3628,8 +3628,8 @@
         </p:nvSpPr>
         <p:spPr>
           <a:xfrm>
-            <a:off x="548640" y="4425696"/>
-            <a:ext cx="6400800" cy="585215"/>
+            <a:off x="777240" y="4206240"/>
+            <a:ext cx="5943600" cy="411480"/>
           </a:xfrm>
           <a:prstGeom prst="rect">
             <a:avLst/>
@@ -3637,13 +3637,13 @@
           <a:noFill/>
         </p:spPr>
         <p:txBody>
-          <a:bodyPr wrap="square" tIns="25400" bIns="0" lIns="0">
+          <a:bodyPr wrap="square">
             <a:spAutoFit/>
           </a:bodyPr>
           <a:lstStyle/>
           <a:p>
             <a:pPr>
-              <a:defRPr sz="800">
+              <a:defRPr sz="1000">
                 <a:solidFill>
                   <a:srgbClr val="CCCCCC"/>
                 </a:solidFill>
@@ -3651,7 +3651,7 @@
               </a:defRPr>
             </a:pPr>
             <a:r>
-              <a:t>Instead of using ARNs for the Lambda function in event source mappings, you can use an alias ARN. Yo</a:t>
+              <a:t>Instead of using ARNs for the Lambda function in event source mappings, you can use an alias ARN. You do not need to upd</a:t>
             </a:r>
           </a:p>
         </p:txBody>
@@ -3933,8 +3933,8 @@
         </p:blipFill>
         <p:spPr>
           <a:xfrm>
-            <a:off x="182880" y="1222454"/>
-            <a:ext cx="5303520" cy="3224371"/>
+            <a:off x="182880" y="914400"/>
+            <a:ext cx="4294730" cy="3840480"/>
           </a:xfrm>
           <a:prstGeom prst="rect">
             <a:avLst/>
@@ -4069,9 +4069,9 @@
           <a:p>
             <a:pPr>
               <a:spcAft>
-                <a:spcPts val="400"/>
+                <a:spcPts val="600"/>
               </a:spcAft>
-              <a:defRPr sz="800">
+              <a:defRPr sz="900">
                 <a:solidFill>
                   <a:srgbClr val="212121"/>
                 </a:solidFill>
@@ -4079,7 +4079,7 @@
               </a:defRPr>
             </a:pPr>
             <a:r>
-              <a:t>• A Lambda event source mapping can either point to the version ARN, or an alias ARN, but not to the layer ARN</a:t>
+              <a:t>• A Lambda event source mapping can either point to the version ARN, or an alias ARN, but not to the layer ARN.</a:t>
             </a:r>
           </a:p>
         </p:txBody>
@@ -4259,7 +4259,7 @@
         <p:spPr>
           <a:xfrm>
             <a:off x="182880" y="914400"/>
-            <a:ext cx="3995417" cy="3840480"/>
+            <a:ext cx="3024286" cy="3840480"/>
           </a:xfrm>
           <a:prstGeom prst="rect">
             <a:avLst/>
@@ -4394,9 +4394,9 @@
           <a:p>
             <a:pPr>
               <a:spcAft>
-                <a:spcPts val="400"/>
+                <a:spcPts val="600"/>
               </a:spcAft>
-              <a:defRPr sz="800">
+              <a:defRPr sz="900">
                 <a:solidFill>
                   <a:srgbClr val="212121"/>
                 </a:solidFill>
@@ -4404,7 +4404,7 @@
               </a:defRPr>
             </a:pPr>
             <a:r>
-              <a:t>• A Lambda alias is a pointer to a specific Lambda function version</a:t>
+              <a:t>• A Lambda alias is a pointer to a specific Lambda function version.</a:t>
             </a:r>
           </a:p>
         </p:txBody>
@@ -4584,7 +4584,7 @@
         <p:spPr>
           <a:xfrm>
             <a:off x="182880" y="914400"/>
-            <a:ext cx="3942497" cy="3840480"/>
+            <a:ext cx="3835575" cy="3840480"/>
           </a:xfrm>
           <a:prstGeom prst="rect">
             <a:avLst/>
@@ -4719,9 +4719,9 @@
           <a:p>
             <a:pPr>
               <a:spcAft>
-                <a:spcPts val="400"/>
+                <a:spcPts val="600"/>
               </a:spcAft>
-              <a:defRPr sz="800">
+              <a:defRPr sz="900">
                 <a:solidFill>
                   <a:srgbClr val="212121"/>
                 </a:solidFill>
@@ -4729,15 +4729,15 @@
               </a:defRPr>
             </a:pPr>
             <a:r>
-              <a:t>• This solution does not address your problem</a:t>
+              <a:t>• This solution does not address your problem.</a:t>
             </a:r>
           </a:p>
           <a:p>
             <a:pPr>
               <a:spcAft>
-                <a:spcPts val="400"/>
+                <a:spcPts val="600"/>
               </a:spcAft>
-              <a:defRPr sz="800">
+              <a:defRPr sz="900">
                 <a:solidFill>
                   <a:srgbClr val="212121"/>
                 </a:solidFill>
@@ -4745,15 +4745,15 @@
               </a:defRPr>
             </a:pPr>
             <a:r>
-              <a:t>• Every alias has its own unique ARN</a:t>
+              <a:t>• Every alias has its own unique ARN.</a:t>
             </a:r>
           </a:p>
           <a:p>
             <a:pPr>
               <a:spcAft>
-                <a:spcPts val="400"/>
+                <a:spcPts val="600"/>
               </a:spcAft>
-              <a:defRPr sz="800">
+              <a:defRPr sz="900">
                 <a:solidFill>
                   <a:srgbClr val="212121"/>
                 </a:solidFill>
@@ -4761,7 +4761,7 @@
               </a:defRPr>
             </a:pPr>
             <a:r>
-              <a:t>• Therefore, you would still need to update the event source mapping with the new ARN when a new version is published</a:t>
+              <a:t>• Therefore, you would still need to update the event source mapping with the new ARN when a new version is published.</a:t>
             </a:r>
           </a:p>
         </p:txBody>
@@ -4940,8 +4940,8 @@
         </p:blipFill>
         <p:spPr>
           <a:xfrm>
-            <a:off x="182880" y="1307539"/>
-            <a:ext cx="5303520" cy="3054201"/>
+            <a:off x="182880" y="914400"/>
+            <a:ext cx="3928232" cy="3840480"/>
           </a:xfrm>
           <a:prstGeom prst="rect">
             <a:avLst/>
@@ -5076,9 +5076,9 @@
           <a:p>
             <a:pPr>
               <a:spcAft>
-                <a:spcPts val="400"/>
+                <a:spcPts val="600"/>
               </a:spcAft>
-              <a:defRPr sz="800">
+              <a:defRPr sz="900">
                 <a:solidFill>
                   <a:srgbClr val="212121"/>
                 </a:solidFill>
@@ -5086,7 +5086,7 @@
               </a:defRPr>
             </a:pPr>
             <a:r>
-              <a:t>• A Lambda alias cannot point to another Lambda alias, only to a Lambda function version</a:t>
+              <a:t>• A Lambda alias cannot point to another Lambda alias, only to a Lambda function version.</a:t>
             </a:r>
           </a:p>
         </p:txBody>
@@ -5265,8 +5265,8 @@
         </p:blipFill>
         <p:spPr>
           <a:xfrm>
-            <a:off x="182880" y="1236099"/>
-            <a:ext cx="5303520" cy="3197081"/>
+            <a:off x="182880" y="1272106"/>
+            <a:ext cx="5303520" cy="3125067"/>
           </a:xfrm>
           <a:prstGeom prst="rect">
             <a:avLst/>
@@ -5401,9 +5401,9 @@
           <a:p>
             <a:pPr>
               <a:spcAft>
-                <a:spcPts val="400"/>
+                <a:spcPts val="600"/>
               </a:spcAft>
-              <a:defRPr sz="800">
+              <a:defRPr sz="900">
                 <a:solidFill>
                   <a:srgbClr val="212121"/>
                 </a:solidFill>
@@ -5411,15 +5411,15 @@
               </a:defRPr>
             </a:pPr>
             <a:r>
-              <a:t>• Instead of using ARNs for the Lambda function in event source mappings</a:t>
+              <a:t>• Instead of using ARNs for the Lambda function in event source mappings, you can use an alias ARN.</a:t>
             </a:r>
           </a:p>
           <a:p>
             <a:pPr>
               <a:spcAft>
-                <a:spcPts val="400"/>
+                <a:spcPts val="600"/>
               </a:spcAft>
-              <a:defRPr sz="800">
+              <a:defRPr sz="900">
                 <a:solidFill>
                   <a:srgbClr val="212121"/>
                 </a:solidFill>
@@ -5427,23 +5427,7 @@
               </a:defRPr>
             </a:pPr>
             <a:r>
-              <a:t>• You can use an alias ARN</a:t>
-            </a:r>
-          </a:p>
-          <a:p>
-            <a:pPr>
-              <a:spcAft>
-                <a:spcPts val="400"/>
-              </a:spcAft>
-              <a:defRPr sz="800">
-                <a:solidFill>
-                  <a:srgbClr val="212121"/>
-                </a:solidFill>
-                <a:latin typeface="Segoe UI"/>
-              </a:defRPr>
-            </a:pPr>
-            <a:r>
-              <a:t>• You do not need to update your event source mappings when you promote a new version or roll back to a previous version</a:t>
+              <a:t>• You do not need to update your event source mappings when you promote a new version or roll back to a previous version.</a:t>
             </a:r>
           </a:p>
         </p:txBody>
